--- a/presentation/PDF_RAG_Chat_Presentation.pptx
+++ b/presentation/PDF_RAG_Chat_Presentation.pptx
@@ -2093,7 +2093,7 @@
                 <a:ea typeface="Calibri" pitchFamily="34" charset="-122"/>
                 <a:cs typeface="Calibri" pitchFamily="34" charset="-120"/>
               </a:rPr>
-              <a:t>[Mini / Major Project]</a:t>
+              <a:t>[Mini Project]</a:t>
             </a:r>
             <a:endParaRPr lang="en-US" sz="1400" dirty="0"/>
           </a:p>
@@ -2149,7 +2149,7 @@
                 <a:ea typeface="Calibri" pitchFamily="34" charset="-122"/>
                 <a:cs typeface="Calibri" pitchFamily="34" charset="-120"/>
               </a:rPr>
-              <a:t>[College Name]  |  [Academic Year]</a:t>
+              <a:t>[College Name]  |  [2025-2026]</a:t>
             </a:r>
             <a:endParaRPr lang="en-US" sz="1400" dirty="0"/>
           </a:p>
